--- a/reports/2026-08_月次実績報告/令和8年8月実績報告.pptx
+++ b/reports/2026-08_月次実績報告/令和8年8月実績報告.pptx
@@ -184,10 +184,10 @@
                   <c:v>111.1</c:v>
                 </c:pt>
                 <c:pt idx="2">
-                  <c:v>130.5</c:v>
+                  <c:v>130.4</c:v>
                 </c:pt>
                 <c:pt idx="3">
-                  <c:v>150.3</c:v>
+                  <c:v>150.2</c:v>
                 </c:pt>
                 <c:pt idx="4">
                   <c:v>38.9</c:v>
@@ -560,10 +560,10 @@
                   <c:v>921</c:v>
                 </c:pt>
                 <c:pt idx="2">
-                  <c:v>2227</c:v>
+                  <c:v>2222</c:v>
                 </c:pt>
                 <c:pt idx="3">
-                  <c:v>3063</c:v>
+                  <c:v>3060</c:v>
                 </c:pt>
                 <c:pt idx="4">
                   <c:v>-13147</c:v>
@@ -639,10 +639,10 @@
                   <c:v>6248</c:v>
                 </c:pt>
                 <c:pt idx="2">
-                  <c:v>9222</c:v>
+                  <c:v>9217</c:v>
                 </c:pt>
                 <c:pt idx="3">
-                  <c:v>13090</c:v>
+                  <c:v>13087</c:v>
                 </c:pt>
                 <c:pt idx="4">
                   <c:v>-798</c:v>
@@ -718,10 +718,10 @@
                   <c:v>6254</c:v>
                 </c:pt>
                 <c:pt idx="2">
-                  <c:v>15190</c:v>
+                  <c:v>15185</c:v>
                 </c:pt>
                 <c:pt idx="3">
-                  <c:v>11879</c:v>
+                  <c:v>11876</c:v>
                 </c:pt>
                 <c:pt idx="4">
                   <c:v>-19</c:v>
@@ -4121,7 +4121,7 @@
                 </a:solidFill>
                 <a:latin typeface="Meiryo UI"/>
               </a:rPr>
-              <a:t>粗利益額: 8月 65,797千円（前期比93.3%・計画比106.5%）</a:t>
+              <a:t>粗利益額: 8月 65,789千円（前期比93.3%・計画比106.5%）</a:t>
             </a:r>
           </a:p>
         </p:txBody>
@@ -4191,7 +4191,7 @@
                 </a:solidFill>
                 <a:latin typeface="Meiryo UI"/>
               </a:rPr>
-              <a:t>・ 粗利は計画比106.5%と計画超過、粗利率24.4%（前期21.5%）。増益は 広域+3,063・松江+2,227 が牽引</a:t>
+              <a:t>・ 粗利は計画比106.5%と計画超過、粗利率24.4%（前期21.5%）。増益は 広域+3,060・松江+2,222 が牽引</a:t>
             </a:r>
           </a:p>
         </p:txBody>
@@ -4748,7 +4748,7 @@
                 </a:solidFill>
                 <a:latin typeface="Meiryo UI"/>
               </a:rPr>
-              <a:t>65,797</a:t>
+              <a:t>65,789</a:t>
             </a:r>
           </a:p>
         </p:txBody>
@@ -5438,7 +5438,7 @@
                 </a:solidFill>
                 <a:latin typeface="Meiryo UI"/>
               </a:rPr>
-              <a:t>382,098</a:t>
+              <a:t>382,091</a:t>
             </a:r>
           </a:p>
         </p:txBody>
@@ -6128,7 +6128,7 @@
                 </a:solidFill>
                 <a:latin typeface="Meiryo UI"/>
               </a:rPr>
-              <a:t>808,994</a:t>
+              <a:t>808,987</a:t>
             </a:r>
           </a:p>
         </p:txBody>
@@ -7614,7 +7614,7 @@
                           </a:solidFill>
                           <a:latin typeface="Meiryo UI"/>
                         </a:rPr>
-                        <a:t>9,530</a:t>
+                        <a:t>9,525</a:t>
                       </a:r>
                     </a:p>
                   </a:txBody>
@@ -7637,7 +7637,7 @@
                           </a:solidFill>
                           <a:latin typeface="Meiryo UI"/>
                         </a:rPr>
-                        <a:t>130.5%</a:t>
+                        <a:t>130.4%</a:t>
                       </a:r>
                     </a:p>
                   </a:txBody>
@@ -7660,7 +7660,7 @@
                           </a:solidFill>
                           <a:latin typeface="Meiryo UI"/>
                         </a:rPr>
-                        <a:t>118.7%</a:t>
+                        <a:t>118.6%</a:t>
                       </a:r>
                     </a:p>
                   </a:txBody>
@@ -7800,7 +7800,7 @@
                           </a:solidFill>
                           <a:latin typeface="Meiryo UI"/>
                         </a:rPr>
-                        <a:t>9,153</a:t>
+                        <a:t>9,150</a:t>
                       </a:r>
                     </a:p>
                   </a:txBody>
@@ -7823,7 +7823,7 @@
                           </a:solidFill>
                           <a:latin typeface="Meiryo UI"/>
                         </a:rPr>
-                        <a:t>150.3%</a:t>
+                        <a:t>150.2%</a:t>
                       </a:r>
                     </a:p>
                   </a:txBody>
@@ -8544,7 +8544,7 @@
                           </a:solidFill>
                           <a:latin typeface="Meiryo UI"/>
                         </a:rPr>
-                        <a:t>65,797</a:t>
+                        <a:t>65,789</a:t>
                       </a:r>
                     </a:p>
                   </a:txBody>
@@ -8658,7 +8658,7 @@
                 </a:solidFill>
                 <a:latin typeface="Meiryo UI"/>
               </a:rPr>
-              <a:t>※ 粗利益額65,797千円は前期比93.3%だが計画比106.5%。減益は前期に機械大口のあった境港（▲13,147）のみで、他6部門は全て増益（粗利計画比109.7%）。水産部は売上123.1%・粗利112.5%</a:t>
+              <a:t>※ 粗利益額65,789千円は前期比93.3%だが計画比106.5%。減益は前期に機械大口のあった境港（▲13,147）のみで、他6部門は全て増益（粗利計画比109.7%）。水産部は売上123.1%・粗利112.5%</a:t>
             </a:r>
           </a:p>
         </p:txBody>
@@ -9614,7 +9614,7 @@
                           </a:solidFill>
                           <a:latin typeface="Meiryo UI"/>
                         </a:rPr>
-                        <a:t>46,211</a:t>
+                        <a:t>46,206</a:t>
                       </a:r>
                     </a:p>
                   </a:txBody>
@@ -9800,7 +9800,7 @@
                           </a:solidFill>
                           <a:latin typeface="Meiryo UI"/>
                         </a:rPr>
-                        <a:t>44,901</a:t>
+                        <a:t>44,899</a:t>
                       </a:r>
                     </a:p>
                   </a:txBody>
@@ -10544,7 +10544,7 @@
                           </a:solidFill>
                           <a:latin typeface="Meiryo UI"/>
                         </a:rPr>
-                        <a:t>382,098</a:t>
+                        <a:t>382,091</a:t>
                       </a:r>
                     </a:p>
                   </a:txBody>
@@ -10658,7 +10658,7 @@
                 </a:solidFill>
                 <a:latin typeface="Meiryo UI"/>
               </a:rPr>
-              <a:t>※ 下期粗利益額382,098千円・前期比118.4%（売上111.0%）。境港は前期比98.6%・計画比95.9%、キョウワは前期比96.3%と前期を下回る</a:t>
+              <a:t>※ 下期粗利益額382,091千円・前期比118.4%（売上111.0%）。境港は前期比98.6%・計画比95.9%、キョウワは前期比96.3%と前期を下回る</a:t>
             </a:r>
           </a:p>
         </p:txBody>
@@ -11614,7 +11614,7 @@
                           </a:solidFill>
                           <a:latin typeface="Meiryo UI"/>
                         </a:rPr>
-                        <a:t>98,955</a:t>
+                        <a:t>98,950</a:t>
                       </a:r>
                     </a:p>
                   </a:txBody>
@@ -11800,7 +11800,7 @@
                           </a:solidFill>
                           <a:latin typeface="Meiryo UI"/>
                         </a:rPr>
-                        <a:t>81,360</a:t>
+                        <a:t>81,358</a:t>
                       </a:r>
                     </a:p>
                   </a:txBody>
@@ -12544,7 +12544,7 @@
                           </a:solidFill>
                           <a:latin typeface="Meiryo UI"/>
                         </a:rPr>
-                        <a:t>808,994</a:t>
+                        <a:t>808,987</a:t>
                       </a:r>
                     </a:p>
                   </a:txBody>
@@ -12658,7 +12658,7 @@
                 </a:solidFill>
                 <a:latin typeface="Meiryo UI"/>
               </a:rPr>
-              <a:t>※ 期初来粗利益額808,994千円・前期比112.7%（売上108.6%）。粗利計画比103.8%と売上計画比100.8%を上回る</a:t>
+              <a:t>※ 期初来粗利益額808,987千円・前期比112.7%（売上108.6%）。粗利計画比103.8%と売上計画比100.8%を上回る</a:t>
             </a:r>
           </a:p>
         </p:txBody>
@@ -13186,7 +13186,7 @@
                 </a:solidFill>
                 <a:latin typeface="Meiryo UI"/>
               </a:rPr>
-              <a:t>8月単月の粗利は▲4,701千円。境港▲13,147（前期ニッスイサーモン向け機械大口の反動）を 広域+3,063・松江+2,227・キョウワ+973・水産部+972 の増益で大半を吸収</a:t>
+              <a:t>8月単月の粗利は▲4,709千円。境港▲13,147（前期ニッスイサーモン向け機械大口の反動）を 広域+3,060・松江+2,222・キョウワ+973・水産部+972 の増益で大半を吸収</a:t>
             </a:r>
           </a:p>
         </p:txBody>
@@ -13557,7 +13557,7 @@
                 </a:solidFill>
                 <a:latin typeface="Meiryo UI"/>
               </a:rPr>
-              <a:t>・ 8月粗利益額 65,797千円（前期比93.3%・計画比106.5%）。売上は前期比82.2%・計画比99.7%</a:t>
+              <a:t>・ 8月粗利益額 65,789千円（前期比93.3%・計画比106.5%）。売上は前期比82.2%・計画比99.7%</a:t>
             </a:r>
           </a:p>
         </p:txBody>
@@ -14017,7 +14017,7 @@
                 </a:solidFill>
                 <a:latin typeface="Meiryo UI"/>
               </a:rPr>
-              <a:t>・ 広域：粗利前期比150.3%（リンガーハット向け牽引）、松江：130.5%（岡田商店・JAしまね等）と粗利率改善を伴う増益</a:t>
+              <a:t>・ 広域：粗利前期比150.2%（リンガーハット向け牽引）、松江：130.4%（岡田商店・JAしまね等）と粗利率改善を伴う増益</a:t>
             </a:r>
           </a:p>
         </p:txBody>
